--- a/VIDEO_AND_PRESENTATION_HERE/ПРЕЗЕНТАЦИЯ.pptx
+++ b/VIDEO_AND_PRESENTATION_HERE/ПРЕЗЕНТАЦИЯ.pptx
@@ -1417,7 +1417,7 @@
         <p:spPr>
           <a:xfrm>
             <a:off x="428625" y="1547431"/>
-            <a:ext cx="5086350" cy="1320143"/>
+            <a:ext cx="5086350" cy="1333698"/>
           </a:xfrm>
           <a:prstGeom prst="rect">
             <a:avLst/>
@@ -1444,10 +1444,28 @@
                 </a:solidFill>
                 <a:latin typeface="Space Grotesk" pitchFamily="34" charset="0"/>
                 <a:ea typeface="Space Grotesk" pitchFamily="34" charset="-122"/>
-                <a:cs typeface="Space Grotesk" pitchFamily="34" charset="-120"/>
-              </a:rPr>
-              <a:t>КАРЬЕРНЫЙ
-ТРЕК AI</a:t>
+              </a:rPr>
+              <a:t>Telegram </a:t>
+            </a:r>
+            <a:r>
+              <a:rPr lang="ru-RU" sz="4353" b="1" dirty="0">
+                <a:solidFill>
+                  <a:srgbClr val="1A1A1A"/>
+                </a:solidFill>
+                <a:latin typeface="Space Grotesk" pitchFamily="34" charset="0"/>
+                <a:ea typeface="Space Grotesk" pitchFamily="34" charset="-122"/>
+              </a:rPr>
+              <a:t>бот </a:t>
+            </a:r>
+            <a:r>
+              <a:rPr lang="en-US" sz="4353" b="1" dirty="0" err="1">
+                <a:solidFill>
+                  <a:srgbClr val="1A1A1A"/>
+                </a:solidFill>
+                <a:latin typeface="Space Grotesk" pitchFamily="34" charset="0"/>
+                <a:ea typeface="Space Grotesk" pitchFamily="34" charset="-122"/>
+              </a:rPr>
+              <a:t>MyCareerStart</a:t>
             </a:r>
             <a:endParaRPr lang="en-US" sz="4353" dirty="0"/>
           </a:p>
@@ -1708,7 +1726,7 @@
         </p:nvSpPr>
         <p:spPr>
           <a:xfrm>
-            <a:off x="435769" y="577500"/>
+            <a:off x="303609" y="288429"/>
             <a:ext cx="8272463" cy="437555"/>
           </a:xfrm>
           <a:prstGeom prst="rect">
@@ -5656,7 +5674,7 @@
         </p:nvSpPr>
         <p:spPr>
           <a:xfrm>
-            <a:off x="873658" y="271463"/>
+            <a:off x="873658" y="1621632"/>
             <a:ext cx="1471613" cy="900113"/>
           </a:xfrm>
           <a:prstGeom prst="rect">
@@ -5688,7 +5706,7 @@
         </p:nvSpPr>
         <p:spPr>
           <a:xfrm>
-            <a:off x="873658" y="271463"/>
+            <a:off x="873658" y="1621632"/>
             <a:ext cx="1471613" cy="900113"/>
           </a:xfrm>
           <a:prstGeom prst="rect">
@@ -5732,7 +5750,7 @@
         </p:nvSpPr>
         <p:spPr>
           <a:xfrm>
-            <a:off x="14288" y="1185863"/>
+            <a:off x="14288" y="2641505"/>
             <a:ext cx="3190382" cy="435769"/>
           </a:xfrm>
           <a:prstGeom prst="rect">
